--- a/PPT/Presentation.pptx
+++ b/PPT/Presentation.pptx
@@ -1310,7 +1310,7 @@
           <a:p>
             <a:fld id="{5BCAD085-E8A6-8845-BD4E-CB4CCA059FC4}" type="datetimeFigureOut">
               <a:rPr lang="en-US" smtClean="0"/>
-              <a:t>7/31/2026</a:t>
+              <a:t>9/7/2026</a:t>
             </a:fld>
             <a:endParaRPr lang="en-US"/>
           </a:p>
@@ -1478,7 +1478,7 @@
           <a:p>
             <a:fld id="{5BCAD085-E8A6-8845-BD4E-CB4CCA059FC4}" type="datetimeFigureOut">
               <a:rPr lang="en-US" smtClean="0"/>
-              <a:t>7/31/2026</a:t>
+              <a:t>9/7/2026</a:t>
             </a:fld>
             <a:endParaRPr lang="en-US"/>
           </a:p>
@@ -1656,7 +1656,7 @@
           <a:p>
             <a:fld id="{5BCAD085-E8A6-8845-BD4E-CB4CCA059FC4}" type="datetimeFigureOut">
               <a:rPr lang="en-US" smtClean="0"/>
-              <a:t>7/31/2026</a:t>
+              <a:t>9/7/2026</a:t>
             </a:fld>
             <a:endParaRPr lang="en-US"/>
           </a:p>
@@ -1824,7 +1824,7 @@
           <a:p>
             <a:fld id="{5BCAD085-E8A6-8845-BD4E-CB4CCA059FC4}" type="datetimeFigureOut">
               <a:rPr lang="en-US" smtClean="0"/>
-              <a:t>7/31/2026</a:t>
+              <a:t>9/7/2026</a:t>
             </a:fld>
             <a:endParaRPr lang="en-US"/>
           </a:p>
@@ -2069,7 +2069,7 @@
           <a:p>
             <a:fld id="{5BCAD085-E8A6-8845-BD4E-CB4CCA059FC4}" type="datetimeFigureOut">
               <a:rPr lang="en-US" smtClean="0"/>
-              <a:t>7/31/2026</a:t>
+              <a:t>9/7/2026</a:t>
             </a:fld>
             <a:endParaRPr lang="en-US"/>
           </a:p>
@@ -2354,7 +2354,7 @@
           <a:p>
             <a:fld id="{5BCAD085-E8A6-8845-BD4E-CB4CCA059FC4}" type="datetimeFigureOut">
               <a:rPr lang="en-US" smtClean="0"/>
-              <a:t>7/31/2026</a:t>
+              <a:t>9/7/2026</a:t>
             </a:fld>
             <a:endParaRPr lang="en-US"/>
           </a:p>
@@ -2773,7 +2773,7 @@
           <a:p>
             <a:fld id="{5BCAD085-E8A6-8845-BD4E-CB4CCA059FC4}" type="datetimeFigureOut">
               <a:rPr lang="en-US" smtClean="0"/>
-              <a:t>7/31/2026</a:t>
+              <a:t>9/7/2026</a:t>
             </a:fld>
             <a:endParaRPr lang="en-US"/>
           </a:p>
@@ -2890,7 +2890,7 @@
           <a:p>
             <a:fld id="{5BCAD085-E8A6-8845-BD4E-CB4CCA059FC4}" type="datetimeFigureOut">
               <a:rPr lang="en-US" smtClean="0"/>
-              <a:t>7/31/2026</a:t>
+              <a:t>9/7/2026</a:t>
             </a:fld>
             <a:endParaRPr lang="en-US"/>
           </a:p>
@@ -2985,7 +2985,7 @@
           <a:p>
             <a:fld id="{5BCAD085-E8A6-8845-BD4E-CB4CCA059FC4}" type="datetimeFigureOut">
               <a:rPr lang="en-US" smtClean="0"/>
-              <a:t>7/31/2026</a:t>
+              <a:t>9/7/2026</a:t>
             </a:fld>
             <a:endParaRPr lang="en-US"/>
           </a:p>
@@ -3260,7 +3260,7 @@
           <a:p>
             <a:fld id="{5BCAD085-E8A6-8845-BD4E-CB4CCA059FC4}" type="datetimeFigureOut">
               <a:rPr lang="en-US" smtClean="0"/>
-              <a:t>7/31/2026</a:t>
+              <a:t>9/7/2026</a:t>
             </a:fld>
             <a:endParaRPr lang="en-US"/>
           </a:p>
@@ -3512,7 +3512,7 @@
           <a:p>
             <a:fld id="{5BCAD085-E8A6-8845-BD4E-CB4CCA059FC4}" type="datetimeFigureOut">
               <a:rPr lang="en-US" smtClean="0"/>
-              <a:t>7/31/2026</a:t>
+              <a:t>9/7/2026</a:t>
             </a:fld>
             <a:endParaRPr lang="en-US"/>
           </a:p>
@@ -3723,7 +3723,7 @@
           <a:p>
             <a:fld id="{5BCAD085-E8A6-8845-BD4E-CB4CCA059FC4}" type="datetimeFigureOut">
               <a:rPr lang="en-US" smtClean="0"/>
-              <a:t>7/31/2026</a:t>
+              <a:t>9/7/2026</a:t>
             </a:fld>
             <a:endParaRPr lang="en-US"/>
           </a:p>
@@ -17944,7 +17944,7 @@
         </p:nvSpPr>
         <p:spPr>
           <a:xfrm>
-            <a:off x="8778240" y="5303520"/>
+            <a:off x="9272016" y="5099615"/>
             <a:ext cx="2926080" cy="2926080"/>
           </a:xfrm>
           <a:prstGeom prst="ellipse">
@@ -17976,7 +17976,7 @@
           <a:lstStyle/>
           <a:p>
             <a:pPr algn="ctr"/>
-            <a:endParaRPr/>
+            <a:endParaRPr dirty="0"/>
           </a:p>
         </p:txBody>
       </p:sp>
